--- a/weibee-steel/docs/Weibee_Bid_Intelligence_In_Depth.pptx
+++ b/weibee-steel/docs/Weibee_Bid_Intelligence_In_Depth.pptx
@@ -139,13 +139,13 @@
   <p:extLst>
     <p:ext uri="{521415D9-36F7-43E2-AB2F-B90AF26B5E84}">
       <p14:sectionLst xmlns:p14="http://schemas.microsoft.com/office/powerpoint/2010/main">
-        <p14:section name="Opening" id="{9dd1446d-6120-c465-095b-96b00343cc1c}">
+        <p14:section name="Opening" id="{7dc8a784-d4f2-ec31-fc75-bc70135e6995}">
           <p14:sldIdLst>
             <p14:sldId id="256"/>
             <p14:sldId id="257"/>
           </p14:sldIdLst>
         </p14:section>
-        <p14:section name="1. Problem and approach" id="{1e2447b9-6a54-b422-dfe1-58af6fe689ff}">
+        <p14:section name="1. Problem and approach" id="{f28745ba-3998-1fba-5f98-de23ec5c8d9e}">
           <p14:sldIdLst>
             <p14:sldId id="258"/>
             <p14:sldId id="259"/>
@@ -153,7 +153,7 @@
             <p14:sldId id="261"/>
           </p14:sldIdLst>
         </p14:section>
-        <p14:section name="2. What the data says" id="{9f0783fe-881c-77af-4efd-f2cba6a22757}">
+        <p14:section name="2. What the data says" id="{7273c07e-2330-f384-14af-f6549d2bd392}">
           <p14:sldIdLst>
             <p14:sldId id="262"/>
             <p14:sldId id="263"/>
@@ -168,7 +168,7 @@
             <p14:sldId id="272"/>
           </p14:sldIdLst>
         </p14:section>
-        <p14:section name="3. The decision tool" id="{1ae28dc0-6789-592c-1c26-3fb1471c1b95}">
+        <p14:section name="3. The decision tool" id="{527bd309-8768-784d-2532-d88858568e06}">
           <p14:sldIdLst>
             <p14:sldId id="273"/>
             <p14:sldId id="274"/>
@@ -178,14 +178,14 @@
             <p14:sldId id="278"/>
           </p14:sldIdLst>
         </p14:section>
-        <p14:section name="4. Trust" id="{d7ba5153-fb65-0651-1c05-75a8e746d56c}">
+        <p14:section name="4. Trust" id="{57854430-87b5-3ca1-85e7-03b2417e3caf}">
           <p14:sldIdLst>
             <p14:sldId id="279"/>
             <p14:sldId id="280"/>
             <p14:sldId id="281"/>
           </p14:sldIdLst>
         </p14:section>
-        <p14:section name="5. Making it real" id="{96c5ab13-02f2-6430-6e86-d09d3174e1c3}">
+        <p14:section name="5. Making it real" id="{9f5062ed-2659-2e0a-302d-a9da2c187a94}">
           <p14:sldIdLst>
             <p14:sldId id="282"/>
             <p14:sldId id="283"/>
@@ -8457,7 +8457,7 @@
           <a:p>
             <a:r>
               <a:rPr lang="en-US" dirty="0"/>
-              <a:t>This is the long version of the executive deck. Same data, every section of the report, plus how the scorecard math works and what it takes to run it on real data. 40 to 45 minutes with questions.</a:t>
+              <a:t>This is the long version of the executive deck. Same data, every section of the report, plus how the scorecard math works and what it takes to run it on real data. 40 to 45 minutes with questions. The synthetic-data note is on this slide only; say it once.</a:t>
             </a:r>
             <a:endParaRPr lang="en-US" dirty="0"/>
           </a:p>
@@ -10041,7 +10041,7 @@
           <a:p>
             <a:r>
               <a:rPr lang="en-US" dirty="0"/>
-              <a:t>The honest slide. The model is clearly better than guessing and clearly not perfect; the synthetic data itself caps achievable accuracy around 0.75 because bidding is noisy.</a:t>
+              <a:t>The honest slide. The model is clearly better than guessing and clearly not perfect; the sample history itself caps achievable accuracy around 0.75 because bidding is noisy.</a:t>
             </a:r>
             <a:endParaRPr lang="en-US" dirty="0"/>
           </a:p>
@@ -10217,7 +10217,7 @@
           <a:p>
             <a:r>
               <a:rPr lang="en-US" dirty="0"/>
-              <a:t>The code does not change. The generator goes away and the loader points at real extracts.</a:t>
+              <a:t>The code does not change. The sample loader is replaced by one pointed at real extracts.</a:t>
             </a:r>
             <a:endParaRPr lang="en-US" dirty="0"/>
           </a:p>
@@ -11658,7 +11658,7 @@
                   <a:schemeClr val="accent5"/>
                 </a:solidFill>
               </a:rPr>
-              <a:t>Weibee Steel  |  Bid intelligence, in depth  |  work sample on synthetic data</a:t>
+              <a:t>Weibee Steel  |  Bid intelligence, in depth</a:t>
             </a:r>
             <a:endParaRPr lang="en-US" sz="850" dirty="0"/>
           </a:p>
@@ -12129,7 +12129,7 @@
                   <a:schemeClr val="accent6"/>
                 </a:solidFill>
               </a:rPr>
-              <a:t>Where we win, what the work actually earns, and which of the next two years' opportunities deserve estimating hours. 413 bids, 36 general contractors, 90 upcoming projects, all synthetic.</a:t>
+              <a:t>Where we win, what the work actually earns, and which of the next two years' opportunities deserve estimating hours. 413 bids, 36 general contractors, 90 upcoming projects.</a:t>
             </a:r>
             <a:endParaRPr lang="en-US" sz="1700" dirty="0"/>
           </a:p>
@@ -12137,7 +12137,43 @@
       </p:sp>
       <p:sp>
         <p:nvSpPr>
-          <p:cNvPr id="4" name="byline"/>
+          <p:cNvPr id="4" name="synthetic note"/>
+          <p:cNvSpPr txBox="1"/>
+          <p:nvPr/>
+        </p:nvSpPr>
+        <p:spPr>
+          <a:xfrm>
+            <a:off x="640080" y="3703320"/>
+            <a:ext cx="7863840" cy="548640"/>
+          </a:xfrm>
+          <a:prstGeom prst="rect">
+            <a:avLst/>
+          </a:prstGeom>
+          <a:noFill/>
+          <a:ln/>
+        </p:spPr>
+        <p:txBody>
+          <a:bodyPr wrap="square" lIns="0" tIns="0" rIns="0" bIns="0" rtlCol="0" anchor="ctr"/>
+          <a:lstStyle/>
+          <a:p>
+            <a:pPr indent="0" marL="0">
+              <a:buNone/>
+            </a:pPr>
+            <a:r>
+              <a:rPr lang="en-US" sz="1200" i="1" dirty="0">
+                <a:solidFill>
+                  <a:schemeClr val="accent4"/>
+                </a:solidFill>
+              </a:rPr>
+              <a:t>Made from synthetic data. Every number in this deck comes from a generated bid history built to behave like a mid-size fabricator; none of it is Weibee Steel's data. The method runs unchanged on real history.</a:t>
+            </a:r>
+            <a:endParaRPr lang="en-US" sz="1200" dirty="0"/>
+          </a:p>
+        </p:txBody>
+      </p:sp>
+      <p:sp>
+        <p:nvSpPr>
+          <p:cNvPr id="5" name="byline"/>
           <p:cNvSpPr txBox="1"/>
           <p:nvPr/>
         </p:nvSpPr>
@@ -22736,7 +22772,7 @@
                   <a:schemeClr val="tx2"/>
                 </a:solidFill>
               </a:rPr>
-              <a:t>From synthetic to Weibee data, a 90-day plan, technology, risks, the monthly KPIs</a:t>
+              <a:t>From the sample to Weibee data, a 90-day plan, technology, risks, the monthly KPIs</a:t>
             </a:r>
             <a:endParaRPr lang="en-US" sz="1150" dirty="0"/>
           </a:p>
@@ -36669,7 +36705,7 @@
                           <a:ea typeface="+mn-lt" pitchFamily="34" charset="-122"/>
                           <a:cs typeface="+mn-lt" pitchFamily="34" charset="-120"/>
                         </a:rPr>
-                        <a:t>Generated to behave like a mid-size fabricator</a:t>
+                        <a:t>Sample history shaped like a mid-size fabricator</a:t>
                       </a:r>
                       <a:endParaRPr lang="en-US" sz="950" dirty="0">
                         <a:latin typeface="+mn-lt" charset="0"/>
@@ -39954,7 +39990,7 @@
       </p:sp>
       <p:sp>
         <p:nvSpPr>
-          <p:cNvPr id="18" name="risk This sample"/>
+          <p:cNvPr id="18" name="risk Adoption"/>
           <p:cNvSpPr/>
           <p:nvPr/>
         </p:nvSpPr>
@@ -40009,7 +40045,7 @@
                   <a:schemeClr val="accent1"/>
                 </a:solidFill>
               </a:rPr>
-              <a:t>This sample</a:t>
+              <a:t>Adoption</a:t>
             </a:r>
             <a:endParaRPr lang="en-US" sz="1250" dirty="0"/>
           </a:p>
@@ -40045,7 +40081,7 @@
                   <a:schemeClr val="tx2"/>
                 </a:solidFill>
               </a:rPr>
-              <a:t>All data is synthetic. Findings illustrate the kind of result, not Weibee Steel.</a:t>
+              <a:t>If the Monday meeting does not work the list, it is a report nobody reads. Mitigation: the estimating manager owns the rules and the hour budget, not the analyst.</a:t>
             </a:r>
             <a:endParaRPr lang="en-US" sz="1000" dirty="0"/>
           </a:p>
@@ -42112,7 +42148,7 @@
                   <a:schemeClr val="accent6"/>
                 </a:solidFill>
               </a:rPr>
-              <a:t>Report, PDF, Tableau data, technical design and code are in the repository. All data is synthetic; the method runs unchanged on real history.</a:t>
+              <a:t>Report, Tableau data, technical design and code are in the repository. The method runs unchanged on real history.</a:t>
             </a:r>
             <a:endParaRPr lang="en-US" sz="1700" dirty="0"/>
           </a:p>
@@ -45564,7 +45600,7 @@
                   <a:schemeClr val="accent6"/>
                 </a:solidFill>
               </a:rPr>
-              <a:t>413 bids over four and three-quarter years, 95 completed jobs, 36 general contractors. Synthetic, but shaped like a real shop.</a:t>
+              <a:t>413 bids over four and three-quarter years, 95 completed jobs, 36 general contractors. Shaped like a real shop's history.</a:t>
             </a:r>
             <a:endParaRPr lang="en-US" sz="1500" dirty="0"/>
           </a:p>

--- a/weibee-steel/docs/Weibee_Bid_Intelligence_In_Depth.pptx
+++ b/weibee-steel/docs/Weibee_Bid_Intelligence_In_Depth.pptx
@@ -139,13 +139,13 @@
   <p:extLst>
     <p:ext uri="{521415D9-36F7-43E2-AB2F-B90AF26B5E84}">
       <p14:sectionLst xmlns:p14="http://schemas.microsoft.com/office/powerpoint/2010/main">
-        <p14:section name="Opening" id="{7dc8a784-d4f2-ec31-fc75-bc70135e6995}">
+        <p14:section name="Opening" id="{c49118fe-13a7-5a37-481f-1e998958eb2e}">
           <p14:sldIdLst>
             <p14:sldId id="256"/>
             <p14:sldId id="257"/>
           </p14:sldIdLst>
         </p14:section>
-        <p14:section name="1. Problem and approach" id="{f28745ba-3998-1fba-5f98-de23ec5c8d9e}">
+        <p14:section name="1. Problem and approach" id="{2f43ebe3-4bb6-a448-df15-a8a178719120}">
           <p14:sldIdLst>
             <p14:sldId id="258"/>
             <p14:sldId id="259"/>
@@ -153,7 +153,7 @@
             <p14:sldId id="261"/>
           </p14:sldIdLst>
         </p14:section>
-        <p14:section name="2. What the data says" id="{7273c07e-2330-f384-14af-f6549d2bd392}">
+        <p14:section name="2. What the data says" id="{e79ad093-89b3-fee0-7503-afabb4efd005}">
           <p14:sldIdLst>
             <p14:sldId id="262"/>
             <p14:sldId id="263"/>
@@ -168,7 +168,7 @@
             <p14:sldId id="272"/>
           </p14:sldIdLst>
         </p14:section>
-        <p14:section name="3. The decision tool" id="{527bd309-8768-784d-2532-d88858568e06}">
+        <p14:section name="3. The decision tool" id="{c6dd041a-6755-c241-a3f8-e607677deed8}">
           <p14:sldIdLst>
             <p14:sldId id="273"/>
             <p14:sldId id="274"/>
@@ -178,14 +178,14 @@
             <p14:sldId id="278"/>
           </p14:sldIdLst>
         </p14:section>
-        <p14:section name="4. Trust" id="{57854430-87b5-3ca1-85e7-03b2417e3caf}">
+        <p14:section name="4. Trust" id="{53a92b77-3cdf-24f2-a677-4f9f1955fb92}">
           <p14:sldIdLst>
             <p14:sldId id="279"/>
             <p14:sldId id="280"/>
             <p14:sldId id="281"/>
           </p14:sldIdLst>
         </p14:section>
-        <p14:section name="5. Making it real" id="{9f5062ed-2659-2e0a-302d-a9da2c187a94}">
+        <p14:section name="5. Making it real" id="{7418c48e-601a-4a94-ef1f-01c60fe89b90}">
           <p14:sldIdLst>
             <p14:sldId id="282"/>
             <p14:sldId id="283"/>
@@ -37690,7 +37690,7 @@
                           <a:ea typeface="+mn-lt" pitchFamily="34" charset="-122"/>
                           <a:cs typeface="+mn-lt" pitchFamily="34" charset="-120"/>
                         </a:rPr>
-                        <a:t>One HTML page, a PDF, a Tableau data layer</a:t>
+                        <a:t>One HTML page and a PDF</a:t>
                       </a:r>
                       <a:endParaRPr lang="en-US" sz="950" dirty="0">
                         <a:latin typeface="+mn-lt" charset="0"/>
@@ -42148,7 +42148,7 @@
                   <a:schemeClr val="accent6"/>
                 </a:solidFill>
               </a:rPr>
-              <a:t>Report, Tableau data, technical design and code are in the repository. The method runs unchanged on real history.</a:t>
+              <a:t>Report, technical design and code come with this deck. The method runs unchanged on real history.</a:t>
             </a:r>
             <a:endParaRPr lang="en-US" sz="1700" dirty="0"/>
           </a:p>
